--- a/docs/examples/project-structure.pptx
+++ b/docs/examples/project-structure.pptx
@@ -7,7 +7,7 @@
   <p:sldIdLst>
     <p:sldId id="256" r:id="rId7"/>
   </p:sldIdLst>
-  <p:sldSz cx="5983468" cy="2021681" type="screen4x3"/>
+  <p:sldSz cx="5983468" cy="2080260" type="screen4x3"/>
   <p:notesSz cx="6858000" cy="9144000"/>
   <p:defaultTextStyle>
     <a:defPPr>
@@ -3097,7 +3097,7 @@
         <p:spPr>
           <a:xfrm>
             <a:off x="1552609" y="137160"/>
-            <a:ext cx="1191388" cy="233362"/>
+            <a:ext cx="1191388" cy="251460"/>
           </a:xfrm>
           <a:prstGeom prst="rect">
             <a:avLst/>
@@ -3125,10 +3125,14 @@
           </a:fontRef>
         </p:style>
         <p:txBody>
-          <a:bodyPr rtlCol="0" anchor="ctr" wrap="none" tIns="0" bIns="0"/>
-          <a:lstStyle/>
-          <a:p>
-            <a:pPr algn="ctr"/>
+          <a:bodyPr rtlCol="0" anchor="ctr" wrap="none"/>
+          <a:lstStyle/>
+          <a:p>
+            <a:pPr algn="ctr">
+              <a:lnSpc>
+                <a:spcPct val="100000"/>
+              </a:lnSpc>
+            </a:pPr>
             <a:r>
               <a:rPr b="0" i="0" sz="1050">
                 <a:solidFill>
@@ -3150,7 +3154,7 @@
         </p:nvCxnSpPr>
         <p:spPr>
           <a:xfrm>
-            <a:off x="2148304" y="370522"/>
+            <a:off x="2148304" y="388620"/>
             <a:ext cx="0" cy="365760"/>
           </a:xfrm>
           <a:prstGeom prst="line">
@@ -3188,8 +3192,8 @@
         </p:nvSpPr>
         <p:spPr>
           <a:xfrm>
-            <a:off x="1607217" y="736282"/>
-            <a:ext cx="1082173" cy="233362"/>
+            <a:off x="1607217" y="754380"/>
+            <a:ext cx="1082173" cy="251459"/>
           </a:xfrm>
           <a:prstGeom prst="rect">
             <a:avLst/>
@@ -3217,10 +3221,14 @@
           </a:fontRef>
         </p:style>
         <p:txBody>
-          <a:bodyPr rtlCol="0" anchor="ctr" wrap="none" tIns="0" bIns="0"/>
-          <a:lstStyle/>
-          <a:p>
-            <a:pPr algn="ctr"/>
+          <a:bodyPr rtlCol="0" anchor="ctr" wrap="none"/>
+          <a:lstStyle/>
+          <a:p>
+            <a:pPr algn="ctr">
+              <a:lnSpc>
+                <a:spcPct val="100000"/>
+              </a:lnSpc>
+            </a:pPr>
             <a:r>
               <a:rPr b="0" i="0" sz="1050">
                 <a:solidFill>
@@ -3242,8 +3250,8 @@
         </p:nvSpPr>
         <p:spPr>
           <a:xfrm>
-            <a:off x="137160" y="1517808"/>
-            <a:ext cx="913328" cy="366712"/>
+            <a:off x="137160" y="1531620"/>
+            <a:ext cx="913328" cy="411479"/>
           </a:xfrm>
           <a:prstGeom prst="rect">
             <a:avLst/>
@@ -3271,10 +3279,14 @@
           </a:fontRef>
         </p:style>
         <p:txBody>
-          <a:bodyPr rtlCol="0" anchor="ctr" wrap="none" tIns="0" bIns="0"/>
-          <a:lstStyle/>
-          <a:p>
-            <a:pPr algn="ctr"/>
+          <a:bodyPr rtlCol="0" anchor="ctr" wrap="none"/>
+          <a:lstStyle/>
+          <a:p>
+            <a:pPr algn="ctr">
+              <a:lnSpc>
+                <a:spcPct val="100000"/>
+              </a:lnSpc>
+            </a:pPr>
             <a:r>
               <a:rPr b="0" i="0" sz="1050">
                 <a:solidFill>
@@ -3287,7 +3299,11 @@
             </a:r>
           </a:p>
           <a:p>
-            <a:pPr algn="ctr"/>
+            <a:pPr algn="ctr">
+              <a:lnSpc>
+                <a:spcPct val="100000"/>
+              </a:lnSpc>
+            </a:pPr>
             <a:r>
               <a:rPr b="0" i="0" sz="1050">
                 <a:solidFill>
@@ -3309,8 +3325,8 @@
         </p:nvSpPr>
         <p:spPr>
           <a:xfrm>
-            <a:off x="1507688" y="1517808"/>
-            <a:ext cx="913328" cy="366712"/>
+            <a:off x="1507688" y="1531620"/>
+            <a:ext cx="913328" cy="411479"/>
           </a:xfrm>
           <a:prstGeom prst="rect">
             <a:avLst/>
@@ -3338,10 +3354,14 @@
           </a:fontRef>
         </p:style>
         <p:txBody>
-          <a:bodyPr rtlCol="0" anchor="ctr" wrap="square" tIns="0" bIns="0"/>
-          <a:lstStyle/>
-          <a:p>
-            <a:pPr algn="ctr"/>
+          <a:bodyPr rtlCol="0" anchor="ctr" wrap="square"/>
+          <a:lstStyle/>
+          <a:p>
+            <a:pPr algn="ctr">
+              <a:lnSpc>
+                <a:spcPct val="100000"/>
+              </a:lnSpc>
+            </a:pPr>
             <a:r>
               <a:rPr b="0" i="0" sz="1050">
                 <a:solidFill>
@@ -3354,7 +3374,11 @@
             </a:r>
           </a:p>
           <a:p>
-            <a:pPr algn="ctr"/>
+            <a:pPr algn="ctr">
+              <a:lnSpc>
+                <a:spcPct val="100000"/>
+              </a:lnSpc>
+            </a:pPr>
             <a:r>
               <a:rPr b="0" i="0" sz="1050">
                 <a:solidFill>
@@ -3376,8 +3400,8 @@
         </p:nvSpPr>
         <p:spPr>
           <a:xfrm>
-            <a:off x="2878216" y="1517808"/>
-            <a:ext cx="913328" cy="366712"/>
+            <a:off x="2878216" y="1531620"/>
+            <a:ext cx="913328" cy="411479"/>
           </a:xfrm>
           <a:prstGeom prst="rect">
             <a:avLst/>
@@ -3405,10 +3429,14 @@
           </a:fontRef>
         </p:style>
         <p:txBody>
-          <a:bodyPr rtlCol="0" anchor="ctr" wrap="square" tIns="0" bIns="0"/>
-          <a:lstStyle/>
-          <a:p>
-            <a:pPr algn="ctr"/>
+          <a:bodyPr rtlCol="0" anchor="ctr" wrap="square"/>
+          <a:lstStyle/>
+          <a:p>
+            <a:pPr algn="ctr">
+              <a:lnSpc>
+                <a:spcPct val="100000"/>
+              </a:lnSpc>
+            </a:pPr>
             <a:r>
               <a:rPr b="0" i="0" sz="1050">
                 <a:solidFill>
@@ -3421,7 +3449,11 @@
             </a:r>
           </a:p>
           <a:p>
-            <a:pPr algn="ctr"/>
+            <a:pPr algn="ctr">
+              <a:lnSpc>
+                <a:spcPct val="100000"/>
+              </a:lnSpc>
+            </a:pPr>
             <a:r>
               <a:rPr b="0" i="0" sz="1050">
                 <a:solidFill>
@@ -3443,8 +3475,8 @@
         </p:nvSpPr>
         <p:spPr>
           <a:xfrm>
-            <a:off x="4248745" y="1517808"/>
-            <a:ext cx="913328" cy="366712"/>
+            <a:off x="4248745" y="1531620"/>
+            <a:ext cx="913328" cy="411479"/>
           </a:xfrm>
           <a:prstGeom prst="rect">
             <a:avLst/>
@@ -3472,10 +3504,14 @@
           </a:fontRef>
         </p:style>
         <p:txBody>
-          <a:bodyPr rtlCol="0" anchor="ctr" wrap="square" tIns="0" bIns="0"/>
-          <a:lstStyle/>
-          <a:p>
-            <a:pPr algn="ctr"/>
+          <a:bodyPr rtlCol="0" anchor="ctr" wrap="square"/>
+          <a:lstStyle/>
+          <a:p>
+            <a:pPr algn="ctr">
+              <a:lnSpc>
+                <a:spcPct val="100000"/>
+              </a:lnSpc>
+            </a:pPr>
             <a:r>
               <a:rPr b="0" i="0" sz="1050">
                 <a:solidFill>
@@ -3488,7 +3524,11 @@
             </a:r>
           </a:p>
           <a:p>
-            <a:pPr algn="ctr"/>
+            <a:pPr algn="ctr">
+              <a:lnSpc>
+                <a:spcPct val="100000"/>
+              </a:lnSpc>
+            </a:pPr>
             <a:r>
               <a:rPr b="0" i="0" sz="1050">
                 <a:solidFill>
@@ -3510,8 +3550,8 @@
         </p:nvSpPr>
         <p:spPr>
           <a:xfrm>
-            <a:off x="5392238" y="1035843"/>
-            <a:ext cx="454069" cy="233362"/>
+            <a:off x="5392238" y="1062989"/>
+            <a:ext cx="454069" cy="251459"/>
           </a:xfrm>
           <a:prstGeom prst="rect">
             <a:avLst/>
@@ -3539,10 +3579,14 @@
           </a:fontRef>
         </p:style>
         <p:txBody>
-          <a:bodyPr rtlCol="0" anchor="ctr" wrap="none" tIns="0" bIns="0"/>
-          <a:lstStyle/>
-          <a:p>
-            <a:pPr algn="ctr"/>
+          <a:bodyPr rtlCol="0" anchor="ctr" wrap="none"/>
+          <a:lstStyle/>
+          <a:p>
+            <a:pPr algn="ctr">
+              <a:lnSpc>
+                <a:spcPct val="100000"/>
+              </a:lnSpc>
+            </a:pPr>
             <a:r>
               <a:rPr b="0" i="0" sz="1050">
                 <a:solidFill>
@@ -3564,7 +3608,7 @@
         </p:nvSpPr>
         <p:spPr>
           <a:xfrm>
-            <a:off x="2148304" y="969645"/>
+            <a:off x="2148304" y="1005839"/>
             <a:ext cx="3243934" cy="182880"/>
           </a:xfrm>
           <a:custGeom>
@@ -3627,8 +3671,8 @@
         </p:nvSpPr>
         <p:spPr>
           <a:xfrm>
-            <a:off x="593824" y="969645"/>
-            <a:ext cx="1554480" cy="548163"/>
+            <a:off x="593824" y="1005839"/>
+            <a:ext cx="1554480" cy="525781"/>
           </a:xfrm>
           <a:custGeom>
             <a:avLst/>
@@ -3637,7 +3681,7 @@
             <a:cxnLst/>
             <a:rect l="l" t="t" r="r" b="b"/>
             <a:pathLst>
-              <a:path w="1554480" h="548163">
+              <a:path w="1554480" h="525781">
                 <a:moveTo>
                   <a:pt x="1554480" y="0"/>
                 </a:moveTo>
@@ -3648,7 +3692,7 @@
                   <a:pt x="0" y="365760"/>
                 </a:lnTo>
                 <a:lnTo>
-                  <a:pt x="0" y="548163"/>
+                  <a:pt x="0" y="525781"/>
                 </a:lnTo>
               </a:path>
             </a:pathLst>
@@ -3693,8 +3737,8 @@
         </p:nvSpPr>
         <p:spPr>
           <a:xfrm>
-            <a:off x="1964352" y="969645"/>
-            <a:ext cx="183952" cy="548163"/>
+            <a:off x="1964352" y="1005839"/>
+            <a:ext cx="183952" cy="525781"/>
           </a:xfrm>
           <a:custGeom>
             <a:avLst/>
@@ -3703,7 +3747,7 @@
             <a:cxnLst/>
             <a:rect l="l" t="t" r="r" b="b"/>
             <a:pathLst>
-              <a:path w="183952" h="548163">
+              <a:path w="183952" h="525781">
                 <a:moveTo>
                   <a:pt x="183952" y="0"/>
                 </a:moveTo>
@@ -3714,7 +3758,7 @@
                   <a:pt x="0" y="365760"/>
                 </a:lnTo>
                 <a:lnTo>
-                  <a:pt x="0" y="548163"/>
+                  <a:pt x="0" y="525781"/>
                 </a:lnTo>
               </a:path>
             </a:pathLst>
@@ -3759,8 +3803,8 @@
         </p:nvSpPr>
         <p:spPr>
           <a:xfrm>
-            <a:off x="2148304" y="969645"/>
-            <a:ext cx="1186577" cy="548163"/>
+            <a:off x="2148304" y="1005839"/>
+            <a:ext cx="1186577" cy="525781"/>
           </a:xfrm>
           <a:custGeom>
             <a:avLst/>
@@ -3769,7 +3813,7 @@
             <a:cxnLst/>
             <a:rect l="l" t="t" r="r" b="b"/>
             <a:pathLst>
-              <a:path w="1186577" h="548163">
+              <a:path w="1186577" h="525781">
                 <a:moveTo>
                   <a:pt x="0" y="0"/>
                 </a:moveTo>
@@ -3780,7 +3824,7 @@
                   <a:pt x="1186577" y="365760"/>
                 </a:lnTo>
                 <a:lnTo>
-                  <a:pt x="1186577" y="548163"/>
+                  <a:pt x="1186577" y="525781"/>
                 </a:lnTo>
               </a:path>
             </a:pathLst>
@@ -3825,8 +3869,8 @@
         </p:nvSpPr>
         <p:spPr>
           <a:xfrm>
-            <a:off x="2148304" y="969645"/>
-            <a:ext cx="2557105" cy="548163"/>
+            <a:off x="2148304" y="1005839"/>
+            <a:ext cx="2557105" cy="525781"/>
           </a:xfrm>
           <a:custGeom>
             <a:avLst/>
@@ -3835,7 +3879,7 @@
             <a:cxnLst/>
             <a:rect l="l" t="t" r="r" b="b"/>
             <a:pathLst>
-              <a:path w="2557105" h="548163">
+              <a:path w="2557105" h="525781">
                 <a:moveTo>
                   <a:pt x="0" y="0"/>
                 </a:moveTo>
@@ -3846,7 +3890,7 @@
                   <a:pt x="2557105" y="365760"/>
                 </a:lnTo>
                 <a:lnTo>
-                  <a:pt x="2557105" y="548163"/>
+                  <a:pt x="2557105" y="525781"/>
                 </a:lnTo>
               </a:path>
             </a:pathLst>
